--- a/docs/content/t_tests/t_tests_activity.pptx
+++ b/docs/content/t_tests/t_tests_activity.pptx
@@ -3303,7 +3303,7 @@
             </a:pPr>
             <a:r>
               <a:rPr/>
-              <a:t>T-Tests: One, Two, Paired</a:t>
+              <a:t>Activity: T-Tests: One, Two, Paired</a:t>
             </a:r>
           </a:p>
         </p:txBody>
@@ -3806,7 +3806,7 @@
             </a:pPr>
             <a:r>
               <a:rPr/>
-              <a:t>Worksheet 6: T-Tests — One, Two, Paired</a:t>
+              <a:t>Worksheet: T-Tests — One, Two, Paired</a:t>
             </a:r>
           </a:p>
         </p:txBody>

--- a/docs/content/t_tests/t_tests_activity.pptx
+++ b/docs/content/t_tests/t_tests_activity.pptx
@@ -4360,7 +4360,43 @@
                 </a:solidFill>
                 <a:latin typeface="Courier"/>
               </a:rPr>
-              <a:t>))</a:t>
+              <a:t>), </a:t>
+            </a:r>
+            <a:r>
+              <a:rPr>
+                <a:solidFill>
+                  <a:srgbClr val="657422"/>
+                </a:solidFill>
+                <a:latin typeface="Courier"/>
+              </a:rPr>
+              <a:t>.groups =</a:t>
+            </a:r>
+            <a:r>
+              <a:rPr>
+                <a:solidFill>
+                  <a:srgbClr val="003B4F"/>
+                </a:solidFill>
+                <a:latin typeface="Courier"/>
+              </a:rPr>
+              <a:t> </a:t>
+            </a:r>
+            <a:r>
+              <a:rPr>
+                <a:solidFill>
+                  <a:srgbClr val="20794D"/>
+                </a:solidFill>
+                <a:latin typeface="Courier"/>
+              </a:rPr>
+              <a:t>"drop"</a:t>
+            </a:r>
+            <a:r>
+              <a:rPr>
+                <a:solidFill>
+                  <a:srgbClr val="003B4F"/>
+                </a:solidFill>
+                <a:latin typeface="Courier"/>
+              </a:rPr>
+              <a:t>)</a:t>
             </a:r>
             <a:br/>
             <a:br/>
@@ -4517,7 +4553,43 @@
                 </a:solidFill>
                 <a:latin typeface="Courier"/>
               </a:rPr>
-              <a:t>))</a:t>
+              <a:t>), </a:t>
+            </a:r>
+            <a:r>
+              <a:rPr>
+                <a:solidFill>
+                  <a:srgbClr val="657422"/>
+                </a:solidFill>
+                <a:latin typeface="Courier"/>
+              </a:rPr>
+              <a:t>.groups =</a:t>
+            </a:r>
+            <a:r>
+              <a:rPr>
+                <a:solidFill>
+                  <a:srgbClr val="003B4F"/>
+                </a:solidFill>
+                <a:latin typeface="Courier"/>
+              </a:rPr>
+              <a:t> </a:t>
+            </a:r>
+            <a:r>
+              <a:rPr>
+                <a:solidFill>
+                  <a:srgbClr val="20794D"/>
+                </a:solidFill>
+                <a:latin typeface="Courier"/>
+              </a:rPr>
+              <a:t>"drop"</a:t>
+            </a:r>
+            <a:r>
+              <a:rPr>
+                <a:solidFill>
+                  <a:srgbClr val="003B4F"/>
+                </a:solidFill>
+                <a:latin typeface="Courier"/>
+              </a:rPr>
+              <a:t>)</a:t>
             </a:r>
             <a:br/>
             <a:br/>
@@ -4689,10 +4761,73 @@
             <a:r>
               <a:rPr>
                 <a:solidFill>
+                  <a:srgbClr val="003B4F"/>
+                </a:solidFill>
+                <a:latin typeface="Courier"/>
+              </a:rPr>
+              <a:t>ps_shady_df </a:t>
+            </a:r>
+            <a:r>
+              <a:rPr>
+                <a:solidFill>
+                  <a:srgbClr val="5E5E5E"/>
+                </a:solidFill>
+                <a:latin typeface="Courier"/>
+              </a:rPr>
+              <a:t>%&gt;%</a:t>
+            </a:r>
+            <a:r>
+              <a:rPr>
+                <a:solidFill>
+                  <a:srgbClr val="003B4F"/>
+                </a:solidFill>
+                <a:latin typeface="Courier"/>
+              </a:rPr>
+              <a:t> </a:t>
+            </a:r>
+            <a:r>
+              <a:rPr>
+                <a:solidFill>
                   <a:srgbClr val="4758AB"/>
                 </a:solidFill>
                 <a:latin typeface="Courier"/>
               </a:rPr>
+              <a:t>arrange</a:t>
+            </a:r>
+            <a:r>
+              <a:rPr>
+                <a:solidFill>
+                  <a:srgbClr val="003B4F"/>
+                </a:solidFill>
+                <a:latin typeface="Courier"/>
+              </a:rPr>
+              <a:t>(tree_no) </a:t>
+            </a:r>
+            <a:r>
+              <a:rPr>
+                <a:solidFill>
+                  <a:srgbClr val="5E5E5E"/>
+                </a:solidFill>
+                <a:latin typeface="Courier"/>
+              </a:rPr>
+              <a:t>%&gt;%</a:t>
+            </a:r>
+            <a:r>
+              <a:rPr>
+                <a:solidFill>
+                  <a:srgbClr val="003B4F"/>
+                </a:solidFill>
+                <a:latin typeface="Courier"/>
+              </a:rPr>
+              <a:t> </a:t>
+            </a:r>
+            <a:r>
+              <a:rPr>
+                <a:solidFill>
+                  <a:srgbClr val="4758AB"/>
+                </a:solidFill>
+                <a:latin typeface="Courier"/>
+              </a:rPr>
               <a:t>head</a:t>
             </a:r>
             <a:r>
@@ -4702,43 +4837,7 @@
                 </a:solidFill>
                 <a:latin typeface="Courier"/>
               </a:rPr>
-              <a:t>(ps_shady_df) </a:t>
-            </a:r>
-            <a:r>
-              <a:rPr>
-                <a:solidFill>
-                  <a:srgbClr val="5E5E5E"/>
-                </a:solidFill>
-                <a:latin typeface="Courier"/>
-              </a:rPr>
-              <a:t>%&gt;%</a:t>
-            </a:r>
-            <a:r>
-              <a:rPr>
-                <a:solidFill>
-                  <a:srgbClr val="003B4F"/>
-                </a:solidFill>
-                <a:latin typeface="Courier"/>
-              </a:rPr>
-              <a:t> </a:t>
-            </a:r>
-            <a:r>
-              <a:rPr>
-                <a:solidFill>
-                  <a:srgbClr val="4758AB"/>
-                </a:solidFill>
-                <a:latin typeface="Courier"/>
-              </a:rPr>
-              <a:t>arrange</a:t>
-            </a:r>
-            <a:r>
-              <a:rPr>
-                <a:solidFill>
-                  <a:srgbClr val="003B4F"/>
-                </a:solidFill>
-                <a:latin typeface="Courier"/>
-              </a:rPr>
-              <a:t>(tree_no)</a:t>
+              <a:t>()</a:t>
             </a:r>
           </a:p>
           <a:p>
@@ -5240,6 +5339,26 @@
                 <a:r>
                   <a:rPr>
                     <a:solidFill>
+                      <a:srgbClr val="5E5E5E"/>
+                    </a:solidFill>
+                    <a:latin typeface="Courier"/>
+                  </a:rPr>
+                  <a:t># The test below is about the SHADY side, so check normality of that group</a:t>
+                </a:r>
+                <a:br/>
+                <a:r>
+                  <a:rPr>
+                    <a:solidFill>
+                      <a:srgbClr val="5E5E5E"/>
+                    </a:solidFill>
+                    <a:latin typeface="Courier"/>
+                  </a:rPr>
+                  <a:t># -- not the two sides pooled together.</a:t>
+                </a:r>
+                <a:br/>
+                <a:r>
+                  <a:rPr>
+                    <a:solidFill>
                       <a:srgbClr val="4758AB"/>
                     </a:solidFill>
                     <a:latin typeface="Courier"/>
@@ -5253,7 +5372,7 @@
                     </a:solidFill>
                     <a:latin typeface="Courier"/>
                   </a:rPr>
-                  <a:t>(ps_df</a:t>
+                  <a:t>(ps_shady_df</a:t>
                 </a:r>
                 <a:r>
                   <a:rPr>
@@ -5308,7 +5427,7 @@
                     </a:solidFill>
                     <a:latin typeface="Courier"/>
                   </a:rPr>
-                  <a:t>"QQ Plot for length of pine needles"</a:t>
+                  <a:t>"QQ Plot — shady side needle length"</a:t>
                 </a:r>
                 <a:r>
                   <a:rPr>
@@ -5383,7 +5502,7 @@
                     </a:solidFill>
                     <a:latin typeface="Courier"/>
                   </a:rPr>
-                  <a:t>(ps_df</a:t>
+                  <a:t>(ps_shady_df</a:t>
                 </a:r>
                 <a:r>
                   <a:rPr>
@@ -5419,6 +5538,39 @@
                 <a:r>
                   <a:rPr/>
                   <a:t> For the Shapiro-Wilk test, what is the null hypothesis? Do we want a significant or a non-significant result here? </a:t>
+                </a:r>
+                <a:r>
+                  <a:rPr>
+                    <a:latin typeface="Courier"/>
+                  </a:rPr>
+                  <a:t>________________________</a:t>
+                </a:r>
+              </a:p>
+              <a:p>
+                <a:pPr lvl="0" indent="0" marL="0">
+                  <a:buNone/>
+                </a:pPr>
+                <a:r>
+                  <a:rPr/>
+                  <a:t>✏️ </a:t>
+                </a:r>
+                <a:r>
+                  <a:rPr b="1"/>
+                  <a:t>Your turn:</a:t>
+                </a:r>
+                <a:r>
+                  <a:rPr/>
+                  <a:t> Why do we check the shady side on its own rather than </a:t>
+                </a:r>
+                <a:r>
+                  <a:rPr>
+                    <a:latin typeface="Courier"/>
+                  </a:rPr>
+                  <a:t>ps_df$length_mm</a:t>
+                </a:r>
+                <a:r>
+                  <a:rPr/>
+                  <a:t> (both sides pooled)? What would pooling two groups with different means do to the shape of the distribution? </a:t>
                 </a:r>
                 <a:r>
                   <a:rPr>
@@ -7269,7 +7421,43 @@
                     </a:solidFill>
                     <a:latin typeface="Courier"/>
                   </a:rPr>
-                  <a:t>(length_mm),</a:t>
+                  <a:t>(length_mm, </a:t>
+                </a:r>
+                <a:r>
+                  <a:rPr>
+                    <a:solidFill>
+                      <a:srgbClr val="657422"/>
+                    </a:solidFill>
+                    <a:latin typeface="Courier"/>
+                  </a:rPr>
+                  <a:t>na.rm =</a:t>
+                </a:r>
+                <a:r>
+                  <a:rPr>
+                    <a:solidFill>
+                      <a:srgbClr val="003B4F"/>
+                    </a:solidFill>
+                    <a:latin typeface="Courier"/>
+                  </a:rPr>
+                  <a:t> </a:t>
+                </a:r>
+                <a:r>
+                  <a:rPr>
+                    <a:solidFill>
+                      <a:srgbClr val="8F5902"/>
+                    </a:solidFill>
+                    <a:latin typeface="Courier"/>
+                  </a:rPr>
+                  <a:t>TRUE</a:t>
+                </a:r>
+                <a:r>
+                  <a:rPr>
+                    <a:solidFill>
+                      <a:srgbClr val="003B4F"/>
+                    </a:solidFill>
+                    <a:latin typeface="Courier"/>
+                  </a:rPr>
+                  <a:t>),</a:t>
                 </a:r>
                 <a:br/>
                 <a:r>
@@ -7315,7 +7503,43 @@
                     </a:solidFill>
                     <a:latin typeface="Courier"/>
                   </a:rPr>
-                  <a:t>(length_mm),</a:t>
+                  <a:t>(length_mm, </a:t>
+                </a:r>
+                <a:r>
+                  <a:rPr>
+                    <a:solidFill>
+                      <a:srgbClr val="657422"/>
+                    </a:solidFill>
+                    <a:latin typeface="Courier"/>
+                  </a:rPr>
+                  <a:t>na.rm =</a:t>
+                </a:r>
+                <a:r>
+                  <a:rPr>
+                    <a:solidFill>
+                      <a:srgbClr val="003B4F"/>
+                    </a:solidFill>
+                    <a:latin typeface="Courier"/>
+                  </a:rPr>
+                  <a:t> </a:t>
+                </a:r>
+                <a:r>
+                  <a:rPr>
+                    <a:solidFill>
+                      <a:srgbClr val="8F5902"/>
+                    </a:solidFill>
+                    <a:latin typeface="Courier"/>
+                  </a:rPr>
+                  <a:t>TRUE</a:t>
+                </a:r>
+                <a:r>
+                  <a:rPr>
+                    <a:solidFill>
+                      <a:srgbClr val="003B4F"/>
+                    </a:solidFill>
+                    <a:latin typeface="Courier"/>
+                  </a:rPr>
+                  <a:t>),</a:t>
                 </a:r>
                 <a:br/>
                 <a:r>
@@ -7352,16 +7576,43 @@
                     </a:solidFill>
                     <a:latin typeface="Courier"/>
                   </a:rPr>
-                  <a:t>n</a:t>
-                </a:r>
-                <a:r>
-                  <a:rPr>
-                    <a:solidFill>
-                      <a:srgbClr val="003B4F"/>
-                    </a:solidFill>
-                    <a:latin typeface="Courier"/>
-                  </a:rPr>
-                  <a:t>(),</a:t>
+                  <a:t>sum</a:t>
+                </a:r>
+                <a:r>
+                  <a:rPr>
+                    <a:solidFill>
+                      <a:srgbClr val="003B4F"/>
+                    </a:solidFill>
+                    <a:latin typeface="Courier"/>
+                  </a:rPr>
+                  <a:t>(</a:t>
+                </a:r>
+                <a:r>
+                  <a:rPr>
+                    <a:solidFill>
+                      <a:srgbClr val="5E5E5E"/>
+                    </a:solidFill>
+                    <a:latin typeface="Courier"/>
+                  </a:rPr>
+                  <a:t>!</a:t>
+                </a:r>
+                <a:r>
+                  <a:rPr>
+                    <a:solidFill>
+                      <a:srgbClr val="4758AB"/>
+                    </a:solidFill>
+                    <a:latin typeface="Courier"/>
+                  </a:rPr>
+                  <a:t>is.na</a:t>
+                </a:r>
+                <a:r>
+                  <a:rPr>
+                    <a:solidFill>
+                      <a:srgbClr val="003B4F"/>
+                    </a:solidFill>
+                    <a:latin typeface="Courier"/>
+                  </a:rPr>
+                  <a:t>(length_mm)),</a:t>
                 </a:r>
                 <a:br/>
                 <a:r>
@@ -7425,7 +7676,44 @@
                     </a:solidFill>
                     <a:latin typeface="Courier"/>
                   </a:rPr>
-                  <a:t>(n)</a:t>
+                  <a:t>(n),</a:t>
+                </a:r>
+                <a:br/>
+                <a:r>
+                  <a:rPr>
+                    <a:solidFill>
+                      <a:srgbClr val="003B4F"/>
+                    </a:solidFill>
+                    <a:latin typeface="Courier"/>
+                  </a:rPr>
+                  <a:t>    </a:t>
+                </a:r>
+                <a:r>
+                  <a:rPr>
+                    <a:solidFill>
+                      <a:srgbClr val="657422"/>
+                    </a:solidFill>
+                    <a:latin typeface="Courier"/>
+                  </a:rPr>
+                  <a:t>.groups =</a:t>
+                </a:r>
+                <a:r>
+                  <a:rPr>
+                    <a:solidFill>
+                      <a:srgbClr val="003B4F"/>
+                    </a:solidFill>
+                    <a:latin typeface="Courier"/>
+                  </a:rPr>
+                  <a:t> </a:t>
+                </a:r>
+                <a:r>
+                  <a:rPr>
+                    <a:solidFill>
+                      <a:srgbClr val="20794D"/>
+                    </a:solidFill>
+                    <a:latin typeface="Courier"/>
+                  </a:rPr>
+                  <a:t>"drop"</a:t>
                 </a:r>
                 <a:br/>
                 <a:r>
@@ -8503,7 +8791,25 @@
                     </a:solidFill>
                     <a:latin typeface="Courier"/>
                   </a:rPr>
-                  <a:t> side, </a:t>
+                  <a:t> </a:t>
+                </a:r>
+                <a:r>
+                  <a:rPr>
+                    <a:solidFill>
+                      <a:srgbClr val="4758AB"/>
+                    </a:solidFill>
+                    <a:latin typeface="Courier"/>
+                  </a:rPr>
+                  <a:t>factor</a:t>
+                </a:r>
+                <a:r>
+                  <a:rPr>
+                    <a:solidFill>
+                      <a:srgbClr val="003B4F"/>
+                    </a:solidFill>
+                    <a:latin typeface="Courier"/>
+                  </a:rPr>
+                  <a:t>(side), </a:t>
                 </a:r>
                 <a:r>
                   <a:rPr>
@@ -9165,16 +9471,25 @@
                     </a:solidFill>
                     <a:latin typeface="Courier"/>
                   </a:rPr>
-                  <a:t>nrow</a:t>
-                </a:r>
-                <a:r>
-                  <a:rPr>
-                    <a:solidFill>
-                      <a:srgbClr val="003B4F"/>
-                    </a:solidFill>
-                    <a:latin typeface="Courier"/>
-                  </a:rPr>
-                  <a:t>(ps_shady_df); n2 &lt;- </a:t>
+                  <a:t>sum</a:t>
+                </a:r>
+                <a:r>
+                  <a:rPr>
+                    <a:solidFill>
+                      <a:srgbClr val="003B4F"/>
+                    </a:solidFill>
+                    <a:latin typeface="Courier"/>
+                  </a:rPr>
+                  <a:t>(</a:t>
+                </a:r>
+                <a:r>
+                  <a:rPr>
+                    <a:solidFill>
+                      <a:srgbClr val="5E5E5E"/>
+                    </a:solidFill>
+                    <a:latin typeface="Courier"/>
+                  </a:rPr>
+                  <a:t>!</a:t>
                 </a:r>
                 <a:r>
                   <a:rPr>
@@ -9183,16 +9498,97 @@
                     </a:solidFill>
                     <a:latin typeface="Courier"/>
                   </a:rPr>
-                  <a:t>nrow</a:t>
-                </a:r>
-                <a:r>
-                  <a:rPr>
-                    <a:solidFill>
-                      <a:srgbClr val="003B4F"/>
-                    </a:solidFill>
-                    <a:latin typeface="Courier"/>
-                  </a:rPr>
-                  <a:t>(ps_sunny_df)</a:t>
+                  <a:t>is.na</a:t>
+                </a:r>
+                <a:r>
+                  <a:rPr>
+                    <a:solidFill>
+                      <a:srgbClr val="003B4F"/>
+                    </a:solidFill>
+                    <a:latin typeface="Courier"/>
+                  </a:rPr>
+                  <a:t>(ps_shady_df</a:t>
+                </a:r>
+                <a:r>
+                  <a:rPr>
+                    <a:solidFill>
+                      <a:srgbClr val="5E5E5E"/>
+                    </a:solidFill>
+                    <a:latin typeface="Courier"/>
+                  </a:rPr>
+                  <a:t>$</a:t>
+                </a:r>
+                <a:r>
+                  <a:rPr>
+                    <a:solidFill>
+                      <a:srgbClr val="003B4F"/>
+                    </a:solidFill>
+                    <a:latin typeface="Courier"/>
+                  </a:rPr>
+                  <a:t>length_mm)); n2 &lt;- </a:t>
+                </a:r>
+                <a:r>
+                  <a:rPr>
+                    <a:solidFill>
+                      <a:srgbClr val="4758AB"/>
+                    </a:solidFill>
+                    <a:latin typeface="Courier"/>
+                  </a:rPr>
+                  <a:t>sum</a:t>
+                </a:r>
+                <a:r>
+                  <a:rPr>
+                    <a:solidFill>
+                      <a:srgbClr val="003B4F"/>
+                    </a:solidFill>
+                    <a:latin typeface="Courier"/>
+                  </a:rPr>
+                  <a:t>(</a:t>
+                </a:r>
+                <a:r>
+                  <a:rPr>
+                    <a:solidFill>
+                      <a:srgbClr val="5E5E5E"/>
+                    </a:solidFill>
+                    <a:latin typeface="Courier"/>
+                  </a:rPr>
+                  <a:t>!</a:t>
+                </a:r>
+                <a:r>
+                  <a:rPr>
+                    <a:solidFill>
+                      <a:srgbClr val="4758AB"/>
+                    </a:solidFill>
+                    <a:latin typeface="Courier"/>
+                  </a:rPr>
+                  <a:t>is.na</a:t>
+                </a:r>
+                <a:r>
+                  <a:rPr>
+                    <a:solidFill>
+                      <a:srgbClr val="003B4F"/>
+                    </a:solidFill>
+                    <a:latin typeface="Courier"/>
+                  </a:rPr>
+                  <a:t>(ps_sunny_df</a:t>
+                </a:r>
+                <a:r>
+                  <a:rPr>
+                    <a:solidFill>
+                      <a:srgbClr val="5E5E5E"/>
+                    </a:solidFill>
+                    <a:latin typeface="Courier"/>
+                  </a:rPr>
+                  <a:t>$</a:t>
+                </a:r>
+                <a:r>
+                  <a:rPr>
+                    <a:solidFill>
+                      <a:srgbClr val="003B4F"/>
+                    </a:solidFill>
+                    <a:latin typeface="Courier"/>
+                  </a:rPr>
+                  <a:t>length_mm))</a:t>
                 </a:r>
                 <a:br/>
                 <a:r>

--- a/docs/content/t_tests/t_tests_activity.pptx
+++ b/docs/content/t_tests/t_tests_activity.pptx
@@ -16,6 +16,7 @@
     <p:sldId id="264" r:id="rId10"/>
     <p:sldId id="265" r:id="rId11"/>
     <p:sldId id="266" r:id="rId12"/>
+    <p:sldId id="267" r:id="rId13"/>
   </p:sldIdLst>
   <p:sldSz cx="9144000" cy="5143500" type="screen16x9"/>
   <p:notesSz cx="6858000" cy="9144000"/>
@@ -3549,6 +3550,493 @@
 </file>
 
 <file path=ppt/slides/slide11.xml><?xml version="1.0" encoding="utf-8"?>
+<p:sld xmlns:a="http://schemas.openxmlformats.org/drawingml/2006/main" xmlns:r="http://schemas.openxmlformats.org/officeDocument/2006/relationships" xmlns:p="http://schemas.openxmlformats.org/presentationml/2006/main">
+  <p:cSld>
+    <p:spTree>
+      <p:nvGrpSpPr>
+        <p:cNvPr id="1" name=""/>
+        <p:cNvGrpSpPr/>
+        <p:nvPr/>
+      </p:nvGrpSpPr>
+      <p:grpSpPr>
+        <a:xfrm>
+          <a:off x="0" y="0"/>
+          <a:ext cx="0" cy="0"/>
+          <a:chOff x="0" y="0"/>
+          <a:chExt cx="0" cy="0"/>
+        </a:xfrm>
+      </p:grpSpPr>
+      <p:sp>
+        <p:nvSpPr>
+          <p:cNvPr id="2" name="Title 1"/>
+          <p:cNvSpPr>
+            <a:spLocks noGrp="1"/>
+          </p:cNvSpPr>
+          <p:nvPr>
+            <p:ph type="title"/>
+          </p:nvPr>
+        </p:nvSpPr>
+        <p:spPr>
+          <a:xfrm>
+            <a:off x="0" y="0"/>
+            <a:ext cx="9144000" cy="582780"/>
+          </a:xfrm>
+        </p:spPr>
+        <p:txBody>
+          <a:bodyPr/>
+          <a:lstStyle/>
+          <a:p>
+            <a:pPr lvl="0" indent="0" marL="0">
+              <a:buNone/>
+            </a:pPr>
+            <a:r>
+              <a:rPr/>
+              <a:t>Part 7 · Take-Home Extension — Mouse Body Mass and the Island Rule</a:t>
+            </a:r>
+          </a:p>
+        </p:txBody>
+      </p:sp>
+      <p:sp>
+        <p:nvSpPr>
+          <p:cNvPr id="3" name="Content Placeholder 2"/>
+          <p:cNvSpPr>
+            <a:spLocks noGrp="1"/>
+          </p:cNvSpPr>
+          <p:nvPr>
+            <p:ph idx="1"/>
+          </p:nvPr>
+        </p:nvSpPr>
+        <p:spPr/>
+        <p:txBody>
+          <a:bodyPr/>
+          <a:lstStyle/>
+          <a:p>
+            <a:pPr lvl="0" indent="0" marL="0">
+              <a:buNone/>
+            </a:pPr>
+            <a:r>
+              <a:rPr i="1"/>
+              <a:t>Due Monday, September 28 — before the Power &amp; Error class.</a:t>
+            </a:r>
+          </a:p>
+          <a:p>
+            <a:pPr lvl="0" indent="0" marL="0">
+              <a:buNone/>
+            </a:pPr>
+            <a:r>
+              <a:rPr/>
+              <a:t>Everything below uses the exact same tests you just ran in Parts 3 and 4 — a one-sample and a two-sample t-test — on a new dataset and a new question. This time you decide which version of each test to run and defend that choice yourself; nobody walks you through it step by step.</a:t>
+            </a:r>
+          </a:p>
+          <a:p>
+            <a:pPr lvl="0" indent="0" marL="0">
+              <a:spcBef>
+                <a:spcPts val="3000"/>
+              </a:spcBef>
+              <a:buNone/>
+            </a:pPr>
+            <a:r>
+              <a:rPr b="1"/>
+              <a:t>Background</a:t>
+            </a:r>
+          </a:p>
+          <a:p>
+            <a:pPr lvl="0" indent="0" marL="0">
+              <a:buNone/>
+            </a:pPr>
+            <a:r>
+              <a:rPr/>
+              <a:t>The </a:t>
+            </a:r>
+            <a:r>
+              <a:rPr b="1"/>
+              <a:t>Island Rule</a:t>
+            </a:r>
+            <a:r>
+              <a:rPr/>
+              <a:t> predicts that when mainland species colonize islands, small-bodied species — like rodents — tend to evolve larger body size, released from mainland predation and competition pressure. Below are body mass measurements for deer mice trapped on Sidney Island (an island population) and near Vancouver, BC (a mainland population).</a:t>
+            </a:r>
+          </a:p>
+          <a:p>
+            <a:pPr lvl="0" indent="0" marL="0">
+              <a:buNone/>
+            </a:pPr>
+            <a:r>
+              <a:rPr b="1"/>
+              <a:t>▶ Run this:</a:t>
+            </a:r>
+          </a:p>
+          <a:p>
+            <a:pPr lvl="0" indent="0">
+              <a:buNone/>
+            </a:pPr>
+            <a:r>
+              <a:rPr>
+                <a:solidFill>
+                  <a:srgbClr val="003B4F"/>
+                </a:solidFill>
+                <a:latin typeface="Courier"/>
+              </a:rPr>
+              <a:t>mice_df &lt;- </a:t>
+            </a:r>
+            <a:r>
+              <a:rPr>
+                <a:solidFill>
+                  <a:srgbClr val="4758AB"/>
+                </a:solidFill>
+                <a:latin typeface="Courier"/>
+              </a:rPr>
+              <a:t>read_csv</a:t>
+            </a:r>
+            <a:r>
+              <a:rPr>
+                <a:solidFill>
+                  <a:srgbClr val="003B4F"/>
+                </a:solidFill>
+                <a:latin typeface="Courier"/>
+              </a:rPr>
+              <a:t>(</a:t>
+            </a:r>
+            <a:r>
+              <a:rPr>
+                <a:solidFill>
+                  <a:srgbClr val="20794D"/>
+                </a:solidFill>
+                <a:latin typeface="Courier"/>
+              </a:rPr>
+              <a:t>"data/mice_weights.csv"</a:t>
+            </a:r>
+            <a:r>
+              <a:rPr>
+                <a:solidFill>
+                  <a:srgbClr val="003B4F"/>
+                </a:solidFill>
+                <a:latin typeface="Courier"/>
+              </a:rPr>
+              <a:t>)</a:t>
+            </a:r>
+            <a:br/>
+            <a:r>
+              <a:rPr>
+                <a:solidFill>
+                  <a:srgbClr val="4758AB"/>
+                </a:solidFill>
+                <a:latin typeface="Courier"/>
+              </a:rPr>
+              <a:t>head</a:t>
+            </a:r>
+            <a:r>
+              <a:rPr>
+                <a:solidFill>
+                  <a:srgbClr val="003B4F"/>
+                </a:solidFill>
+                <a:latin typeface="Courier"/>
+              </a:rPr>
+              <a:t>(mice_df)</a:t>
+            </a:r>
+          </a:p>
+          <a:p>
+            <a:pPr lvl="0" indent="0" marL="0">
+              <a:spcBef>
+                <a:spcPts val="3000"/>
+              </a:spcBef>
+              <a:buNone/>
+            </a:pPr>
+            <a:r>
+              <a:rPr b="1"/>
+              <a:t>Task A · One-Sample Question</a:t>
+            </a:r>
+          </a:p>
+          <a:p>
+            <a:pPr lvl="0" indent="0" marL="0">
+              <a:buNone/>
+            </a:pPr>
+            <a:r>
+              <a:rPr b="1"/>
+              <a:t>Question:</a:t>
+            </a:r>
+            <a:r>
+              <a:rPr/>
+              <a:t> Do island mice (Sidney Island) differ from a “typical” continental deer mouse body mass of 19 g?</a:t>
+            </a:r>
+          </a:p>
+          <a:p>
+            <a:pPr lvl="0" indent="0" marL="0">
+              <a:buNone/>
+            </a:pPr>
+            <a:r>
+              <a:rPr/>
+              <a:t>✏️ </a:t>
+            </a:r>
+            <a:r>
+              <a:rPr b="1"/>
+              <a:t>Your turn:</a:t>
+            </a:r>
+            <a:r>
+              <a:rPr/>
+              <a:t> Write your hypotheses, decide which test is appropriate and justify your choice, then write and run the code, and interpret the result.</a:t>
+            </a:r>
+          </a:p>
+          <a:p>
+            <a:pPr lvl="0" indent="0">
+              <a:buNone/>
+            </a:pPr>
+            <a:r>
+              <a:rPr>
+                <a:latin typeface="Courier"/>
+              </a:rPr>
+              <a:t>H0 =
+________________________________________________________
+Ha =
+________________________________________________________
+Test I will use and why:
+________________________________________________________</a:t>
+            </a:r>
+          </a:p>
+          <a:p>
+            <a:pPr lvl="0" indent="0">
+              <a:buNone/>
+            </a:pPr>
+            <a:r>
+              <a:rPr>
+                <a:solidFill>
+                  <a:srgbClr val="5E5E5E"/>
+                </a:solidFill>
+                <a:latin typeface="Courier"/>
+              </a:rPr>
+              <a:t># Write your code here:</a:t>
+            </a:r>
+          </a:p>
+          <a:p>
+            <a:pPr lvl="0" indent="0">
+              <a:buNone/>
+            </a:pPr>
+            <a:r>
+              <a:rPr>
+                <a:latin typeface="Courier"/>
+              </a:rPr>
+              <a:t>Interpretation:
+________________________________________________________
+________________________________________________________</a:t>
+            </a:r>
+          </a:p>
+          <a:p>
+            <a:pPr lvl="0" indent="0" marL="0">
+              <a:spcBef>
+                <a:spcPts val="3000"/>
+              </a:spcBef>
+              <a:buNone/>
+            </a:pPr>
+            <a:r>
+              <a:rPr b="1"/>
+              <a:t>Task B · Two-Sample Question</a:t>
+            </a:r>
+          </a:p>
+          <a:p>
+            <a:pPr lvl="0" indent="0" marL="0">
+              <a:buNone/>
+            </a:pPr>
+            <a:r>
+              <a:rPr b="1"/>
+              <a:t>Question:</a:t>
+            </a:r>
+            <a:r>
+              <a:rPr/>
+              <a:t> Does mouse body mass differ between the island (Sidney Island) and mainland (Vancouver) populations?</a:t>
+            </a:r>
+          </a:p>
+          <a:p>
+            <a:pPr lvl="0" indent="0" marL="0">
+              <a:buNone/>
+            </a:pPr>
+            <a:r>
+              <a:rPr/>
+              <a:t>✏️ </a:t>
+            </a:r>
+            <a:r>
+              <a:rPr b="1"/>
+              <a:t>Your turn:</a:t>
+            </a:r>
+            <a:r>
+              <a:rPr/>
+              <a:t> Same process — hypotheses, test choice and justification, code, and interpretation. (Hint: in Part 4 you used Levene’s test to decide between the standard and Welch’s two-sample t-test — do that check again here, on your own, before picking one.)</a:t>
+            </a:r>
+          </a:p>
+          <a:p>
+            <a:pPr lvl="0" indent="0">
+              <a:buNone/>
+            </a:pPr>
+            <a:r>
+              <a:rPr>
+                <a:latin typeface="Courier"/>
+              </a:rPr>
+              <a:t>H0 =
+________________________________________________________
+Ha =
+________________________________________________________
+Test I will use and why:
+________________________________________________________</a:t>
+            </a:r>
+          </a:p>
+          <a:p>
+            <a:pPr lvl="0" indent="0">
+              <a:buNone/>
+            </a:pPr>
+            <a:r>
+              <a:rPr>
+                <a:solidFill>
+                  <a:srgbClr val="5E5E5E"/>
+                </a:solidFill>
+                <a:latin typeface="Courier"/>
+              </a:rPr>
+              <a:t># Write your code here:</a:t>
+            </a:r>
+          </a:p>
+          <a:p>
+            <a:pPr lvl="0" indent="0">
+              <a:buNone/>
+            </a:pPr>
+            <a:r>
+              <a:rPr>
+                <a:latin typeface="Courier"/>
+              </a:rPr>
+              <a:t>Interpretation:
+________________________________________________________
+________________________________________________________</a:t>
+            </a:r>
+          </a:p>
+          <a:p>
+            <a:pPr lvl="0" indent="0" marL="0">
+              <a:spcBef>
+                <a:spcPts val="3000"/>
+              </a:spcBef>
+              <a:buNone/>
+            </a:pPr>
+            <a:r>
+              <a:rPr b="1"/>
+              <a:t>Final Figure</a:t>
+            </a:r>
+          </a:p>
+          <a:p>
+            <a:pPr lvl="0" indent="0" marL="0">
+              <a:buNone/>
+            </a:pPr>
+            <a:r>
+              <a:rPr/>
+              <a:t>Produce one publication-quality figure summarizing island vs. mainland body mass — proper axis labels, no default </a:t>
+            </a:r>
+            <a:r>
+              <a:rPr>
+                <a:latin typeface="Courier"/>
+              </a:rPr>
+              <a:t>ggplot</a:t>
+            </a:r>
+            <a:r>
+              <a:rPr/>
+              <a:t> grey background — and export it with </a:t>
+            </a:r>
+            <a:r>
+              <a:rPr>
+                <a:latin typeface="Courier"/>
+              </a:rPr>
+              <a:t>ggsave()</a:t>
+            </a:r>
+            <a:r>
+              <a:rPr/>
+              <a:t>.</a:t>
+            </a:r>
+          </a:p>
+          <a:p>
+            <a:pPr lvl="0" indent="0">
+              <a:buNone/>
+            </a:pPr>
+            <a:r>
+              <a:rPr>
+                <a:solidFill>
+                  <a:srgbClr val="5E5E5E"/>
+                </a:solidFill>
+                <a:latin typeface="Courier"/>
+              </a:rPr>
+              <a:t># Write your code here:</a:t>
+            </a:r>
+          </a:p>
+          <a:p>
+            <a:pPr lvl="0" indent="0" marL="1270000">
+              <a:buNone/>
+            </a:pPr>
+            <a:r>
+              <a:rPr sz="2000" b="1"/>
+              <a:t>Note</a:t>
+            </a:r>
+          </a:p>
+          <a:p>
+            <a:pPr lvl="0" indent="0" marL="1270000">
+              <a:buNone/>
+            </a:pPr>
+            <a:r>
+              <a:rPr sz="2000" b="1"/>
+              <a:t>📤 What to turn in — due Sept 28</a:t>
+            </a:r>
+          </a:p>
+          <a:p>
+            <a:pPr lvl="0" indent="0" marL="1270000">
+              <a:buNone/>
+            </a:pPr>
+            <a:r>
+              <a:rPr sz="2000"/>
+              <a:t>Your write-up should include, for both Task A and Task B:</a:t>
+            </a:r>
+          </a:p>
+          <a:p>
+            <a:pPr lvl="0"/>
+            <a:r>
+              <a:rPr sz="2000"/>
+              <a:t>☐ The question</a:t>
+            </a:r>
+          </a:p>
+          <a:p>
+            <a:pPr lvl="0"/>
+            <a:r>
+              <a:rPr sz="2000"/>
+              <a:t>☐ Your hypotheses</a:t>
+            </a:r>
+          </a:p>
+          <a:p>
+            <a:pPr lvl="0"/>
+            <a:r>
+              <a:rPr sz="2000"/>
+              <a:t>☐ Which test you used, and your justification for choosing it</a:t>
+            </a:r>
+          </a:p>
+          <a:p>
+            <a:pPr lvl="0"/>
+            <a:r>
+              <a:rPr sz="2000"/>
+              <a:t>☐ The code and its output</a:t>
+            </a:r>
+          </a:p>
+          <a:p>
+            <a:pPr lvl="0"/>
+            <a:r>
+              <a:rPr sz="2000"/>
+              <a:t>☐ Your interpretation of the result</a:t>
+            </a:r>
+          </a:p>
+          <a:p>
+            <a:pPr lvl="0"/>
+            <a:r>
+              <a:rPr sz="2000"/>
+              <a:t>☐ A final figure showing the result</a:t>
+            </a:r>
+          </a:p>
+        </p:txBody>
+      </p:sp>
+    </p:spTree>
+  </p:cSld>
+</p:sld>
+</file>
+
+<file path=ppt/slides/slide12.xml><?xml version="1.0" encoding="utf-8"?>
 <p:sld xmlns:a="http://schemas.openxmlformats.org/drawingml/2006/main" xmlns:r="http://schemas.openxmlformats.org/officeDocument/2006/relationships" xmlns:p="http://schemas.openxmlformats.org/presentationml/2006/main">
   <p:cSld>
     <p:spTree>
